--- a/training/Latin American Spanish (es-419)/Diapositivas para los Módulos - es [COBT-T]/17e Compartiendo PTBI - WT diapositivas.pptx
+++ b/training/Latin American Spanish (es-419)/Diapositivas para los Módulos - es [COBT-T]/17e Compartiendo PTBI - WT diapositivas.pptx
@@ -224,7 +224,7 @@
           <a:p>
             <a:fld id="{AC6AA070-92F4-A447-BB88-F5E94FF9CF8B}" type="datetimeFigureOut">
               <a:rPr lang="en-US" smtClean="0"/>
-              <a:t>3/8/23</a:t>
+              <a:t>4/15/25</a:t>
             </a:fld>
             <a:endParaRPr lang="en-US"/>
           </a:p>
@@ -535,6 +535,93 @@
           <a:bodyPr/>
           <a:lstStyle/>
           <a:p>
+            <a:r>
+              <a:rPr lang="en-US"/>
+              <a:t>04/2025</a:t>
+            </a:r>
+          </a:p>
+        </p:txBody>
+      </p:sp>
+      <p:sp>
+        <p:nvSpPr>
+          <p:cNvPr id="4" name="Slide Number Placeholder 3"/>
+          <p:cNvSpPr>
+            <a:spLocks noGrp="1"/>
+          </p:cNvSpPr>
+          <p:nvPr>
+            <p:ph type="sldNum" sz="quarter" idx="5"/>
+          </p:nvPr>
+        </p:nvSpPr>
+        <p:spPr/>
+        <p:txBody>
+          <a:bodyPr/>
+          <a:lstStyle/>
+          <a:p>
+            <a:fld id="{9939B3C9-13A9-6540-8F68-9A544DD081BF}" type="slidenum">
+              <a:rPr lang="en-US" smtClean="0"/>
+              <a:t>1</a:t>
+            </a:fld>
+            <a:endParaRPr lang="en-US"/>
+          </a:p>
+        </p:txBody>
+      </p:sp>
+    </p:spTree>
+    <p:extLst>
+      <p:ext uri="{BB962C8B-B14F-4D97-AF65-F5344CB8AC3E}">
+        <p14:creationId xmlns:p14="http://schemas.microsoft.com/office/powerpoint/2010/main" val="4075920539"/>
+      </p:ext>
+    </p:extLst>
+  </p:cSld>
+  <p:clrMapOvr>
+    <a:masterClrMapping/>
+  </p:clrMapOvr>
+</p:notes>
+</file>
+
+<file path=ppt/notesSlides/notesSlide2.xml><?xml version="1.0" encoding="utf-8"?>
+<p:notes xmlns:a="http://schemas.openxmlformats.org/drawingml/2006/main" xmlns:r="http://schemas.openxmlformats.org/officeDocument/2006/relationships" xmlns:p="http://schemas.openxmlformats.org/presentationml/2006/main">
+  <p:cSld>
+    <p:spTree>
+      <p:nvGrpSpPr>
+        <p:cNvPr id="1" name=""/>
+        <p:cNvGrpSpPr/>
+        <p:nvPr/>
+      </p:nvGrpSpPr>
+      <p:grpSpPr>
+        <a:xfrm>
+          <a:off x="0" y="0"/>
+          <a:ext cx="0" cy="0"/>
+          <a:chOff x="0" y="0"/>
+          <a:chExt cx="0" cy="0"/>
+        </a:xfrm>
+      </p:grpSpPr>
+      <p:sp>
+        <p:nvSpPr>
+          <p:cNvPr id="2" name="Slide Image Placeholder 1"/>
+          <p:cNvSpPr>
+            <a:spLocks noGrp="1" noRot="1" noChangeAspect="1"/>
+          </p:cNvSpPr>
+          <p:nvPr>
+            <p:ph type="sldImg"/>
+          </p:nvPr>
+        </p:nvSpPr>
+        <p:spPr/>
+      </p:sp>
+      <p:sp>
+        <p:nvSpPr>
+          <p:cNvPr id="3" name="Notes Placeholder 2"/>
+          <p:cNvSpPr>
+            <a:spLocks noGrp="1"/>
+          </p:cNvSpPr>
+          <p:nvPr>
+            <p:ph type="body" idx="1"/>
+          </p:nvPr>
+        </p:nvSpPr>
+        <p:spPr/>
+        <p:txBody>
+          <a:bodyPr/>
+          <a:lstStyle/>
+          <a:p>
             <a:endParaRPr lang="en-US"/>
           </a:p>
         </p:txBody>
@@ -575,7 +662,7 @@
 </p:notes>
 </file>
 
-<file path=ppt/notesSlides/notesSlide2.xml><?xml version="1.0" encoding="utf-8"?>
+<file path=ppt/notesSlides/notesSlide3.xml><?xml version="1.0" encoding="utf-8"?>
 <p:notes xmlns:a="http://schemas.openxmlformats.org/drawingml/2006/main" xmlns:r="http://schemas.openxmlformats.org/officeDocument/2006/relationships" xmlns:p="http://schemas.openxmlformats.org/presentationml/2006/main">
   <p:cSld>
     <p:spTree>
@@ -799,7 +886,7 @@
           <a:p>
             <a:fld id="{2D176C0A-5C67-429D-B78E-C0F7FE360763}" type="datetimeFigureOut">
               <a:rPr lang="en-US" smtClean="0"/>
-              <a:t>3/8/23</a:t>
+              <a:t>4/15/25</a:t>
             </a:fld>
             <a:endParaRPr lang="en-US"/>
           </a:p>
@@ -2256,7 +2343,7 @@
           <p:nvPr/>
         </p:nvPicPr>
         <p:blipFill rotWithShape="1">
-          <a:blip r:embed="rId2">
+          <a:blip r:embed="rId3">
             <a:extLst>
               <a:ext uri="{28A0092B-C50C-407E-A947-70E740481C1C}">
                 <a14:useLocalDpi xmlns:a14="http://schemas.microsoft.com/office/drawing/2010/main" val="0"/>
@@ -3025,7 +3112,7 @@
                 <a:ea typeface="MS Mincho" panose="02020609040205080304" pitchFamily="49" charset="-128"/>
                 <a:cs typeface="Times New Roman" panose="02020603050405020304" pitchFamily="18" charset="0"/>
               </a:rPr>
-              <a:t> de Jesus</a:t>
+              <a:t> de Jesús</a:t>
             </a:r>
             <a:endParaRPr lang="en-US" sz="2400" dirty="0">
               <a:solidFill>
@@ -3058,7 +3145,7 @@
           <a:p>
             <a:r>
               <a:rPr lang="en-US" dirty="0"/>
-              <a:t>La Gran Commission</a:t>
+              <a:t>La Gran Comisión</a:t>
             </a:r>
             <a:br>
               <a:rPr lang="en-US" dirty="0"/>
@@ -3946,30 +4033,30 @@
           <a:lstStyle/>
           <a:p>
             <a:r>
-              <a:rPr lang="en-US"/>
+              <a:rPr lang="en-US" dirty="0"/>
               <a:t>Las </a:t>
             </a:r>
             <a:r>
-              <a:rPr lang="en-US" err="1"/>
+              <a:rPr lang="en-US" dirty="0" err="1"/>
               <a:t>Escrituras</a:t>
             </a:r>
             <a:r>
-              <a:rPr lang="en-US"/>
+              <a:rPr lang="en-US" dirty="0"/>
               <a:t> </a:t>
             </a:r>
             <a:r>
-              <a:rPr lang="en-US" err="1"/>
+              <a:rPr lang="en-US" dirty="0" err="1"/>
               <a:t>Cambian</a:t>
             </a:r>
             <a:r>
-              <a:rPr lang="en-US"/>
+              <a:rPr lang="en-US" dirty="0"/>
               <a:t> la </a:t>
             </a:r>
             <a:r>
-              <a:rPr lang="en-US" err="1"/>
-              <a:t>Communidad</a:t>
-            </a:r>
-            <a:endParaRPr lang="en-US"/>
+              <a:rPr lang="en-US" dirty="0" err="1"/>
+              <a:t>Comunidad</a:t>
+            </a:r>
+            <a:endParaRPr lang="en-US" dirty="0"/>
           </a:p>
         </p:txBody>
       </p:sp>
@@ -4457,7 +4544,7 @@
                 <a:ea typeface="Calibri" panose="020F0502020204030204" pitchFamily="34" charset="0"/>
                 <a:cs typeface="Times New Roman" panose="02020603050405020304" pitchFamily="18" charset="0"/>
               </a:rPr>
-              <a:t>bautisadas</a:t>
+              <a:t>bautizadas</a:t>
             </a:r>
             <a:br>
               <a:rPr lang="en-US" sz="2200" dirty="0">
@@ -6279,6 +6366,12 @@
 </file>
 
 <file path=customXml/item1.xml><?xml version="1.0" encoding="utf-8"?>
+<p:properties xmlns:p="http://schemas.microsoft.com/office/2006/metadata/properties" xmlns:xsi="http://www.w3.org/2001/XMLSchema-instance" xmlns:pc="http://schemas.microsoft.com/office/infopath/2007/PartnerControls">
+  <documentManagement/>
+</p:properties>
+</file>
+
+<file path=customXml/item2.xml><?xml version="1.0" encoding="utf-8"?>
 <ct:contentTypeSchema xmlns:ct="http://schemas.microsoft.com/office/2006/metadata/contentType" xmlns:ma="http://schemas.microsoft.com/office/2006/metadata/properties/metaAttributes" ct:_="" ma:_="" ma:contentTypeName="Document" ma:contentTypeID="0x0101002F017C5ECD5AE84588140775F5D9B6FC" ma:contentTypeVersion="10" ma:contentTypeDescription="Create a new document." ma:contentTypeScope="" ma:versionID="3fff9ed69b78a1d1c48e3f96068d2b17">
   <xsd:schema xmlns:xsd="http://www.w3.org/2001/XMLSchema" xmlns:xs="http://www.w3.org/2001/XMLSchema" xmlns:p="http://schemas.microsoft.com/office/2006/metadata/properties" xmlns:ns2="fee82e44-1fa4-4144-8309-00fed2bf4198" xmlns:ns3="1a61c928-f5f6-4989-bd5d-cb8872a1b06d" targetNamespace="http://schemas.microsoft.com/office/2006/metadata/properties" ma:root="true" ma:fieldsID="7b2c40b849e0c1cff02f16dd8f1be10b" ns2:_="" ns3:_="">
     <xsd:import namespace="fee82e44-1fa4-4144-8309-00fed2bf4198"/>
@@ -6479,7 +6572,7 @@
 </ct:contentTypeSchema>
 </file>
 
-<file path=customXml/item2.xml><?xml version="1.0" encoding="utf-8"?>
+<file path=customXml/item3.xml><?xml version="1.0" encoding="utf-8"?>
 <?mso-contentType ?>
 <FormTemplates xmlns="http://schemas.microsoft.com/sharepoint/v3/contenttype/forms">
   <Display>DocumentLibraryForm</Display>
@@ -6488,25 +6581,7 @@
 </FormTemplates>
 </file>
 
-<file path=customXml/item3.xml><?xml version="1.0" encoding="utf-8"?>
-<p:properties xmlns:p="http://schemas.microsoft.com/office/2006/metadata/properties" xmlns:xsi="http://www.w3.org/2001/XMLSchema-instance" xmlns:pc="http://schemas.microsoft.com/office/infopath/2007/PartnerControls">
-  <documentManagement/>
-</p:properties>
-</file>
-
 <file path=customXml/itemProps1.xml><?xml version="1.0" encoding="utf-8"?>
-<ds:datastoreItem xmlns:ds="http://schemas.openxmlformats.org/officeDocument/2006/customXml" ds:itemID="{0F212F35-63B0-4637-AE7C-13FBCF58AD51}"/>
-</file>
-
-<file path=customXml/itemProps2.xml><?xml version="1.0" encoding="utf-8"?>
-<ds:datastoreItem xmlns:ds="http://schemas.openxmlformats.org/officeDocument/2006/customXml" ds:itemID="{B178770A-F6AC-406B-AF0D-88CBCF36B701}">
-  <ds:schemaRefs>
-    <ds:schemaRef ds:uri="http://schemas.microsoft.com/sharepoint/v3/contenttype/forms"/>
-  </ds:schemaRefs>
-</ds:datastoreItem>
-</file>
-
-<file path=customXml/itemProps3.xml><?xml version="1.0" encoding="utf-8"?>
 <ds:datastoreItem xmlns:ds="http://schemas.openxmlformats.org/officeDocument/2006/customXml" ds:itemID="{DD870300-B03F-45F7-9154-521D8C74684E}">
   <ds:schemaRefs>
     <ds:schemaRef ds:uri="http://www.w3.org/XML/1998/namespace"/>
@@ -6521,4 +6596,31 @@
     <ds:schemaRef ds:uri="http://schemas.microsoft.com/office/2006/metadata/properties"/>
   </ds:schemaRefs>
 </ds:datastoreItem>
+</file>
+
+<file path=customXml/itemProps2.xml><?xml version="1.0" encoding="utf-8"?>
+<ds:datastoreItem xmlns:ds="http://schemas.openxmlformats.org/officeDocument/2006/customXml" ds:itemID="{0F212F35-63B0-4637-AE7C-13FBCF58AD51}">
+  <ds:schemaRefs>
+    <ds:schemaRef ds:uri="http://schemas.microsoft.com/office/2006/metadata/contentType"/>
+    <ds:schemaRef ds:uri="http://schemas.microsoft.com/office/2006/metadata/properties/metaAttributes"/>
+    <ds:schemaRef ds:uri="http://www.w3.org/2001/XMLSchema"/>
+    <ds:schemaRef ds:uri="http://schemas.microsoft.com/office/2006/metadata/properties"/>
+    <ds:schemaRef ds:uri="fee82e44-1fa4-4144-8309-00fed2bf4198"/>
+    <ds:schemaRef ds:uri="1a61c928-f5f6-4989-bd5d-cb8872a1b06d"/>
+    <ds:schemaRef ds:uri="http://schemas.microsoft.com/office/2006/documentManagement/types"/>
+    <ds:schemaRef ds:uri="http://schemas.microsoft.com/office/infopath/2007/PartnerControls"/>
+    <ds:schemaRef ds:uri="http://schemas.openxmlformats.org/package/2006/metadata/core-properties"/>
+    <ds:schemaRef ds:uri="http://purl.org/dc/elements/1.1/"/>
+    <ds:schemaRef ds:uri="http://purl.org/dc/terms/"/>
+    <ds:schemaRef ds:uri="http://schemas.microsoft.com/internal/obd"/>
+  </ds:schemaRefs>
+</ds:datastoreItem>
+</file>
+
+<file path=customXml/itemProps3.xml><?xml version="1.0" encoding="utf-8"?>
+<ds:datastoreItem xmlns:ds="http://schemas.openxmlformats.org/officeDocument/2006/customXml" ds:itemID="{B178770A-F6AC-406B-AF0D-88CBCF36B701}">
+  <ds:schemaRefs>
+    <ds:schemaRef ds:uri="http://schemas.microsoft.com/sharepoint/v3/contenttype/forms"/>
+  </ds:schemaRefs>
+</ds:datastoreItem>
 </file>